--- a/chapter1/parts/part-06-uses-of-datasets/clip.pptx
+++ b/chapter1/parts/part-06-uses-of-datasets/clip.pptx
@@ -4185,10 +4185,12 @@
           </a:bodyPr>
           <a:lstStyle/>
           <a:p>
-            <a:pPr>
+            <a:pPr lvl="0" marL="457200" indent="-228600">
+              <a:buFont typeface="Calibri"/>
               <a:spcAft>
                 <a:spcPts val="1000"/>
               </a:spcAft>
+              <a:buSzPct val="100000"/>
               <a:buChar char="•"/>
               <a:lnSpc>
                 <a:spcPts val="2200"/>
@@ -4205,10 +4207,12 @@
             </a:r>
           </a:p>
           <a:p>
-            <a:pPr>
+            <a:pPr lvl="0" marL="457200" indent="-228600">
+              <a:buFont typeface="Calibri"/>
               <a:spcAft>
                 <a:spcPts val="1000"/>
               </a:spcAft>
+              <a:buSzPct val="100000"/>
               <a:buChar char="•"/>
               <a:lnSpc>
                 <a:spcPts val="2200"/>
@@ -4344,10 +4348,12 @@
           </a:bodyPr>
           <a:lstStyle/>
           <a:p>
-            <a:pPr>
+            <a:pPr lvl="0" marL="457200" indent="-228600">
+              <a:buFont typeface="Calibri"/>
               <a:spcAft>
                 <a:spcPts val="1000"/>
               </a:spcAft>
+              <a:buSzPct val="100000"/>
               <a:buChar char="•"/>
               <a:lnSpc>
                 <a:spcPts val="2200"/>
@@ -4364,10 +4370,12 @@
             </a:r>
           </a:p>
           <a:p>
-            <a:pPr>
+            <a:pPr lvl="0" marL="457200" indent="-228600">
+              <a:buFont typeface="Calibri"/>
               <a:spcAft>
                 <a:spcPts val="1000"/>
               </a:spcAft>
+              <a:buSzPct val="100000"/>
               <a:buChar char="•"/>
               <a:lnSpc>
                 <a:spcPts val="2200"/>
@@ -4503,10 +4511,12 @@
           </a:bodyPr>
           <a:lstStyle/>
           <a:p>
-            <a:pPr>
+            <a:pPr lvl="0" marL="457200" indent="-228600">
+              <a:buFont typeface="Calibri"/>
               <a:spcAft>
                 <a:spcPts val="1000"/>
               </a:spcAft>
+              <a:buSzPct val="100000"/>
               <a:buChar char="•"/>
               <a:lnSpc>
                 <a:spcPts val="2200"/>
@@ -4523,10 +4533,12 @@
             </a:r>
           </a:p>
           <a:p>
-            <a:pPr>
+            <a:pPr lvl="0" marL="457200" indent="-228600">
+              <a:buFont typeface="Calibri"/>
               <a:spcAft>
                 <a:spcPts val="1000"/>
               </a:spcAft>
+              <a:buSzPct val="100000"/>
               <a:buChar char="•"/>
               <a:lnSpc>
                 <a:spcPts val="2200"/>
@@ -4543,10 +4555,12 @@
             </a:r>
           </a:p>
           <a:p>
-            <a:pPr>
+            <a:pPr lvl="0" marL="457200" indent="-228600">
+              <a:buFont typeface="Calibri"/>
               <a:spcAft>
                 <a:spcPts val="1000"/>
               </a:spcAft>
+              <a:buSzPct val="100000"/>
               <a:buChar char="•"/>
               <a:lnSpc>
                 <a:spcPts val="2200"/>
@@ -4563,10 +4577,12 @@
             </a:r>
           </a:p>
           <a:p>
-            <a:pPr>
+            <a:pPr lvl="0" marL="457200" indent="-228600">
+              <a:buFont typeface="Calibri"/>
               <a:spcAft>
                 <a:spcPts val="1000"/>
               </a:spcAft>
+              <a:buSzPct val="100000"/>
               <a:buChar char="•"/>
               <a:lnSpc>
                 <a:spcPts val="2200"/>
@@ -4583,10 +4599,12 @@
             </a:r>
           </a:p>
           <a:p>
-            <a:pPr>
+            <a:pPr lvl="0" marL="457200" indent="-228600">
+              <a:buFont typeface="Calibri"/>
               <a:spcAft>
                 <a:spcPts val="1000"/>
               </a:spcAft>
+              <a:buSzPct val="100000"/>
               <a:buChar char="•"/>
               <a:lnSpc>
                 <a:spcPts val="2200"/>
@@ -4722,10 +4740,12 @@
           </a:bodyPr>
           <a:lstStyle/>
           <a:p>
-            <a:pPr>
+            <a:pPr lvl="0" marL="457200" indent="-228600">
+              <a:buFont typeface="Calibri"/>
               <a:spcAft>
                 <a:spcPts val="1000"/>
               </a:spcAft>
+              <a:buSzPct val="100000"/>
               <a:buChar char="•"/>
               <a:lnSpc>
                 <a:spcPts val="2200"/>
@@ -4742,10 +4762,12 @@
             </a:r>
           </a:p>
           <a:p>
-            <a:pPr>
+            <a:pPr lvl="0" marL="457200" indent="-228600">
+              <a:buFont typeface="Calibri"/>
               <a:spcAft>
                 <a:spcPts val="1000"/>
               </a:spcAft>
+              <a:buSzPct val="100000"/>
               <a:buChar char="•"/>
               <a:lnSpc>
                 <a:spcPts val="2200"/>
@@ -4881,10 +4903,12 @@
           </a:bodyPr>
           <a:lstStyle/>
           <a:p>
-            <a:pPr>
+            <a:pPr lvl="0" marL="457200" indent="-228600">
+              <a:buFont typeface="Calibri"/>
               <a:spcAft>
                 <a:spcPts val="1000"/>
               </a:spcAft>
+              <a:buSzPct val="100000"/>
               <a:buChar char="•"/>
               <a:lnSpc>
                 <a:spcPts val="2200"/>
@@ -4901,10 +4925,12 @@
             </a:r>
           </a:p>
           <a:p>
-            <a:pPr>
+            <a:pPr lvl="0" marL="457200" indent="-228600">
+              <a:buFont typeface="Calibri"/>
               <a:spcAft>
                 <a:spcPts val="1000"/>
               </a:spcAft>
+              <a:buSzPct val="100000"/>
               <a:buChar char="•"/>
               <a:lnSpc>
                 <a:spcPts val="2200"/>
@@ -4921,10 +4947,12 @@
             </a:r>
           </a:p>
           <a:p>
-            <a:pPr>
+            <a:pPr lvl="0" marL="457200" indent="-228600">
+              <a:buFont typeface="Calibri"/>
               <a:spcAft>
                 <a:spcPts val="1000"/>
               </a:spcAft>
+              <a:buSzPct val="100000"/>
               <a:buChar char="•"/>
               <a:lnSpc>
                 <a:spcPts val="2200"/>
@@ -4941,10 +4969,12 @@
             </a:r>
           </a:p>
           <a:p>
-            <a:pPr>
+            <a:pPr lvl="0" marL="457200" indent="-228600">
+              <a:buFont typeface="Calibri"/>
               <a:spcAft>
                 <a:spcPts val="1000"/>
               </a:spcAft>
+              <a:buSzPct val="100000"/>
               <a:buChar char="•"/>
               <a:lnSpc>
                 <a:spcPts val="2200"/>
@@ -4961,10 +4991,12 @@
             </a:r>
           </a:p>
           <a:p>
-            <a:pPr>
+            <a:pPr lvl="0" marL="457200" indent="-228600">
+              <a:buFont typeface="Calibri"/>
               <a:spcAft>
                 <a:spcPts val="1000"/>
               </a:spcAft>
+              <a:buSzPct val="100000"/>
               <a:buChar char="•"/>
               <a:lnSpc>
                 <a:spcPts val="2200"/>
@@ -5563,10 +5595,12 @@
           </a:bodyPr>
           <a:lstStyle/>
           <a:p>
-            <a:pPr>
+            <a:pPr lvl="0" marL="457200" indent="-228600">
+              <a:buFont typeface="Calibri"/>
               <a:spcAft>
                 <a:spcPts val="1000"/>
               </a:spcAft>
+              <a:buSzPct val="100000"/>
               <a:buChar char="•"/>
               <a:lnSpc>
                 <a:spcPts val="2200"/>
@@ -5583,10 +5617,12 @@
             </a:r>
           </a:p>
           <a:p>
-            <a:pPr>
+            <a:pPr lvl="0" marL="457200" indent="-228600">
+              <a:buFont typeface="Calibri"/>
               <a:spcAft>
                 <a:spcPts val="1000"/>
               </a:spcAft>
+              <a:buSzPct val="100000"/>
               <a:buChar char="•"/>
               <a:lnSpc>
                 <a:spcPts val="2200"/>
@@ -5603,10 +5639,12 @@
             </a:r>
           </a:p>
           <a:p>
-            <a:pPr>
+            <a:pPr lvl="0" marL="457200" indent="-228600">
+              <a:buFont typeface="Calibri"/>
               <a:spcAft>
                 <a:spcPts val="1000"/>
               </a:spcAft>
+              <a:buSzPct val="100000"/>
               <a:buChar char="•"/>
               <a:lnSpc>
                 <a:spcPts val="2200"/>
@@ -5742,10 +5780,12 @@
           </a:bodyPr>
           <a:lstStyle/>
           <a:p>
-            <a:pPr>
+            <a:pPr lvl="0" marL="457200" indent="-228600">
+              <a:buFont typeface="Calibri"/>
               <a:spcAft>
                 <a:spcPts val="1000"/>
               </a:spcAft>
+              <a:buSzPct val="100000"/>
               <a:buChar char="•"/>
               <a:lnSpc>
                 <a:spcPts val="2200"/>
@@ -5762,10 +5802,12 @@
             </a:r>
           </a:p>
           <a:p>
-            <a:pPr>
+            <a:pPr lvl="0" marL="457200" indent="-228600">
+              <a:buFont typeface="Calibri"/>
               <a:spcAft>
                 <a:spcPts val="1000"/>
               </a:spcAft>
+              <a:buSzPct val="100000"/>
               <a:buChar char="•"/>
               <a:lnSpc>
                 <a:spcPts val="2200"/>
